--- a/dist/초5/영어/상호작용과문화/초5_영어_상호작용과문화_03_명절과문화.pptx
+++ b/dist/초5/영어/상호작용과문화/초5_영어_상호작용과문화_03_명절과문화.pptx
@@ -120,13 +120,13 @@
   <p:extLst>
     <p:ext uri="{521415D9-36F7-43E2-AB2F-B90AF26B5E84}">
       <p14:sectionLst xmlns:p14="http://schemas.microsoft.com/office/powerpoint/2010/main">
-        <p14:section name="도입" id="{cf676159-c7ec-c2f9-0fd1-a139b47bf79a}">
+        <p14:section name="도입" id="{f52433b4-d478-8121-1c9c-1ae7e6d5789b}">
           <p14:sldIdLst>
             <p14:sldId id="256"/>
             <p14:sldId id="257"/>
           </p14:sldIdLst>
         </p14:section>
-        <p14:section name="개념" id="{594317f8-89af-9ed7-3831-6e3cf4380aeb}">
+        <p14:section name="개념" id="{ca5fcb14-208d-a164-c53b-ccaced78ede1}">
           <p14:sldIdLst>
             <p14:sldId id="258"/>
             <p14:sldId id="259"/>
@@ -134,32 +134,32 @@
             <p14:sldId id="262"/>
           </p14:sldIdLst>
         </p14:section>
-        <p14:section name="연습" id="{ec8a76b8-721e-3d08-e705-7de9391eec22}">
+        <p14:section name="연습" id="{717b66b9-c9db-141b-63a7-bb0b4502d53c}">
           <p14:sldIdLst>
             <p14:sldId id="261"/>
             <p14:sldId id="263"/>
             <p14:sldId id="264"/>
           </p14:sldIdLst>
         </p14:section>
-        <p14:section name="개념" id="{413f046b-25dc-224c-5e6c-4524ad1b9631}">
+        <p14:section name="개념" id="{e0b16bf4-2c84-1771-18af-4fd2684ffec2}">
           <p14:sldIdLst/>
         </p14:section>
-        <p14:section name="연습" id="{e0f76758-4b7e-d7d2-c15d-3fd4976361c1}">
+        <p14:section name="연습" id="{2404a17f-ad27-1cf0-68fb-0481631305bf}">
           <p14:sldIdLst/>
         </p14:section>
-        <p14:section name="확인" id="{ea68b8fb-6aeb-7cdd-24f5-edf28e7099a6}">
+        <p14:section name="확인" id="{b8008460-5520-e9e5-943a-7fec9a8a599a}">
           <p14:sldIdLst>
             <p14:sldId id="265"/>
             <p14:sldId id="266"/>
             <p14:sldId id="267"/>
           </p14:sldIdLst>
         </p14:section>
-        <p14:section name="정리" id="{b20a9947-c1db-85e2-66ab-3f0a8d5545e5}">
+        <p14:section name="정리" id="{c0f89396-b2ae-063c-9a4a-c68f2fe41fb2}">
           <p14:sldIdLst>
             <p14:sldId id="268"/>
           </p14:sldIdLst>
         </p14:section>
-        <p14:section name="보충" id="{09a7760f-7e62-223d-d247-1fce93b45a3e}">
+        <p14:section name="보충" id="{e19a6364-d414-617f-5679-75a4e87e751a}">
           <p14:sldIdLst>
             <p14:sldId id="269"/>
           </p14:sldIdLst>
